--- a/docs/slides/COIL_methods_module.pptx
+++ b/docs/slides/COIL_methods_module.pptx
@@ -22893,7 +22893,7 @@
                 <a:ea typeface="Calibri" pitchFamily="34" charset="-122"/>
                 <a:cs typeface="Calibri" pitchFamily="34" charset="-120"/>
               </a:rPr>
-              <a:t>On the website (Resources): metodos.py (Python), metodos.R (R) and metodos.inp (Gretl). They reproduce every number in this module. Put them in the same folder as coil_indicators_gretl.csv.</a:t>
+              <a:t>On the website (Resources): methods.py (Python), methods.R (R) and methods.inp (Gretl). They reproduce every number in this module. Put them in the same folder as coil_indicators_gretl.csv.</a:t>
             </a:r>
             <a:endParaRPr lang="en-US" sz="1500" dirty="0"/>
           </a:p>
